--- a/ppt/Python11-Sys.pptx
+++ b/ppt/Python11-Sys.pptx
@@ -5,10 +5,10 @@
     <p:sldMasterId id="2147483653" r:id="rId1"/>
   </p:sldMasterIdLst>
   <p:notesMasterIdLst>
-    <p:notesMasterId r:id="rId23"/>
+    <p:notesMasterId r:id="rId22"/>
   </p:notesMasterIdLst>
   <p:handoutMasterIdLst>
-    <p:handoutMasterId r:id="rId24"/>
+    <p:handoutMasterId r:id="rId23"/>
   </p:handoutMasterIdLst>
   <p:sldIdLst>
     <p:sldId id="264" r:id="rId2"/>
@@ -27,11 +27,10 @@
     <p:sldId id="280" r:id="rId15"/>
     <p:sldId id="281" r:id="rId16"/>
     <p:sldId id="282" r:id="rId17"/>
-    <p:sldId id="283" r:id="rId18"/>
-    <p:sldId id="284" r:id="rId19"/>
-    <p:sldId id="285" r:id="rId20"/>
-    <p:sldId id="296" r:id="rId21"/>
-    <p:sldId id="297" r:id="rId22"/>
+    <p:sldId id="284" r:id="rId18"/>
+    <p:sldId id="285" r:id="rId19"/>
+    <p:sldId id="296" r:id="rId20"/>
+    <p:sldId id="297" r:id="rId21"/>
   </p:sldIdLst>
   <p:sldSz cx="9144000" cy="6858000" type="screen4x3"/>
   <p:notesSz cx="6648450" cy="9782175"/>
@@ -4911,9 +4910,10 @@
           <a:lstStyle/>
           <a:p>
             <a:r>
-              <a:rPr lang="fr-FR" dirty="0"/>
-              <a:t>Sérialisation</a:t>
-            </a:r>
+              <a:rPr lang="fr-FR" dirty="0" err="1"/>
+              <a:t>Pickle</a:t>
+            </a:r>
+            <a:endParaRPr lang="fr-FR" dirty="0"/>
           </a:p>
         </p:txBody>
       </p:sp>
@@ -4933,44 +4933,374 @@
           <a:lstStyle/>
           <a:p>
             <a:r>
-              <a:rPr lang="fr-FR" dirty="0"/>
-              <a:t>Transformation d’un objet en binaire</a:t>
-            </a:r>
+              <a:rPr lang="en-GB" altLang="fr-FR" dirty="0" err="1"/>
+              <a:t>C'est</a:t>
+            </a:r>
+            <a:r>
+              <a:rPr lang="en-GB" altLang="fr-FR" dirty="0"/>
+              <a:t> un module </a:t>
+            </a:r>
+            <a:r>
+              <a:rPr lang="en-GB" altLang="fr-FR" dirty="0" err="1"/>
+              <a:t>étonnant</a:t>
+            </a:r>
+            <a:r>
+              <a:rPr lang="en-GB" altLang="fr-FR" dirty="0"/>
+              <a:t> qui </a:t>
+            </a:r>
+            <a:r>
+              <a:rPr lang="en-GB" altLang="fr-FR" dirty="0" err="1"/>
+              <a:t>peut</a:t>
+            </a:r>
+            <a:r>
+              <a:rPr lang="en-GB" altLang="fr-FR" dirty="0"/>
+              <a:t> </a:t>
+            </a:r>
+            <a:r>
+              <a:rPr lang="en-GB" altLang="fr-FR" dirty="0" err="1"/>
+              <a:t>prendre</a:t>
+            </a:r>
+            <a:r>
+              <a:rPr lang="en-GB" altLang="fr-FR" dirty="0"/>
+              <a:t> </a:t>
+            </a:r>
+            <a:r>
+              <a:rPr lang="en-GB" altLang="fr-FR" dirty="0" err="1"/>
+              <a:t>presque</a:t>
+            </a:r>
+            <a:r>
+              <a:rPr lang="en-GB" altLang="fr-FR" dirty="0"/>
+              <a:t> </a:t>
+            </a:r>
+            <a:r>
+              <a:rPr lang="en-GB" altLang="fr-FR" dirty="0" err="1"/>
+              <a:t>n'importe</a:t>
+            </a:r>
+            <a:r>
+              <a:rPr lang="en-GB" altLang="fr-FR" dirty="0"/>
+              <a:t> </a:t>
+            </a:r>
+            <a:r>
+              <a:rPr lang="en-GB" altLang="fr-FR" dirty="0" err="1"/>
+              <a:t>quel</a:t>
+            </a:r>
+            <a:r>
+              <a:rPr lang="en-GB" altLang="fr-FR" dirty="0"/>
+              <a:t> objet Python, et le </a:t>
+            </a:r>
+            <a:r>
+              <a:rPr lang="en-GB" altLang="fr-FR" dirty="0" err="1"/>
+              <a:t>convertir</a:t>
+            </a:r>
+            <a:r>
+              <a:rPr lang="en-GB" altLang="fr-FR" dirty="0"/>
+              <a:t> </a:t>
+            </a:r>
+            <a:r>
+              <a:rPr lang="en-GB" altLang="fr-FR" dirty="0" err="1"/>
+              <a:t>en</a:t>
+            </a:r>
+            <a:r>
+              <a:rPr lang="en-GB" altLang="fr-FR" dirty="0"/>
+              <a:t> </a:t>
+            </a:r>
+            <a:r>
+              <a:rPr lang="en-GB" altLang="fr-FR" dirty="0" err="1"/>
+              <a:t>une</a:t>
+            </a:r>
+            <a:r>
+              <a:rPr lang="en-GB" altLang="fr-FR" dirty="0"/>
+              <a:t> </a:t>
+            </a:r>
+            <a:r>
+              <a:rPr lang="en-GB" altLang="fr-FR" dirty="0" err="1"/>
+              <a:t>représentation</a:t>
+            </a:r>
+            <a:r>
+              <a:rPr lang="en-GB" altLang="fr-FR" dirty="0"/>
+              <a:t> sous </a:t>
+            </a:r>
+            <a:r>
+              <a:rPr lang="en-GB" altLang="fr-FR" dirty="0" err="1"/>
+              <a:t>forme</a:t>
+            </a:r>
+            <a:r>
+              <a:rPr lang="en-GB" altLang="fr-FR" dirty="0"/>
+              <a:t> de </a:t>
+            </a:r>
+            <a:r>
+              <a:rPr lang="en-GB" altLang="fr-FR" dirty="0" err="1"/>
+              <a:t>chaîne</a:t>
+            </a:r>
+            <a:r>
+              <a:rPr lang="en-GB" altLang="fr-FR" dirty="0"/>
+              <a:t> de </a:t>
+            </a:r>
+            <a:r>
+              <a:rPr lang="en-GB" altLang="fr-FR" dirty="0" err="1"/>
+              <a:t>caractères</a:t>
+            </a:r>
+            <a:endParaRPr lang="en-GB" altLang="fr-FR" dirty="0"/>
+          </a:p>
+          <a:p>
+            <a:r>
+              <a:rPr lang="en-GB" altLang="fr-FR" dirty="0"/>
+              <a:t>Ce </a:t>
+            </a:r>
+            <a:r>
+              <a:rPr lang="en-GB" altLang="fr-FR" dirty="0" err="1"/>
+              <a:t>processus</a:t>
+            </a:r>
+            <a:r>
+              <a:rPr lang="en-GB" altLang="fr-FR" dirty="0"/>
+              <a:t> </a:t>
+            </a:r>
+            <a:r>
+              <a:rPr lang="en-GB" altLang="fr-FR" dirty="0" err="1"/>
+              <a:t>s'appelle</a:t>
+            </a:r>
+            <a:r>
+              <a:rPr lang="en-GB" altLang="fr-FR" dirty="0"/>
+              <a:t> </a:t>
+            </a:r>
+            <a:r>
+              <a:rPr lang="en-GB" altLang="fr-FR" b="1" dirty="0"/>
+              <a:t>pickling</a:t>
+            </a:r>
+            <a:endParaRPr lang="en-GB" altLang="fr-FR" dirty="0"/>
+          </a:p>
+          <a:p>
+            <a:r>
+              <a:rPr lang="en-GB" altLang="fr-FR" dirty="0" err="1"/>
+              <a:t>Reconstruire</a:t>
+            </a:r>
+            <a:r>
+              <a:rPr lang="en-GB" altLang="fr-FR" dirty="0"/>
+              <a:t> </a:t>
+            </a:r>
+            <a:r>
+              <a:rPr lang="en-GB" altLang="fr-FR" dirty="0" err="1"/>
+              <a:t>l'objet</a:t>
+            </a:r>
+            <a:r>
+              <a:rPr lang="en-GB" altLang="fr-FR" dirty="0"/>
+              <a:t> à </a:t>
+            </a:r>
+            <a:r>
+              <a:rPr lang="en-GB" altLang="fr-FR" dirty="0" err="1"/>
+              <a:t>partir</a:t>
+            </a:r>
+            <a:r>
+              <a:rPr lang="en-GB" altLang="fr-FR" dirty="0"/>
+              <a:t> de </a:t>
+            </a:r>
+            <a:r>
+              <a:rPr lang="en-GB" altLang="fr-FR" dirty="0" err="1"/>
+              <a:t>sa</a:t>
+            </a:r>
+            <a:r>
+              <a:rPr lang="en-GB" altLang="fr-FR" dirty="0"/>
+              <a:t> </a:t>
+            </a:r>
+            <a:r>
+              <a:rPr lang="en-GB" altLang="fr-FR" dirty="0" err="1"/>
+              <a:t>représentation</a:t>
+            </a:r>
+            <a:r>
+              <a:rPr lang="en-GB" altLang="fr-FR" dirty="0"/>
+              <a:t> </a:t>
+            </a:r>
+            <a:r>
+              <a:rPr lang="en-GB" altLang="fr-FR" dirty="0" err="1"/>
+              <a:t>en</a:t>
+            </a:r>
+            <a:r>
+              <a:rPr lang="en-GB" altLang="fr-FR" dirty="0"/>
+              <a:t> </a:t>
+            </a:r>
+            <a:r>
+              <a:rPr lang="en-GB" altLang="fr-FR" dirty="0" err="1"/>
+              <a:t>chaîne</a:t>
+            </a:r>
+            <a:r>
+              <a:rPr lang="en-GB" altLang="fr-FR" dirty="0"/>
+              <a:t> de </a:t>
+            </a:r>
+            <a:r>
+              <a:rPr lang="en-GB" altLang="fr-FR" dirty="0" err="1"/>
+              <a:t>caractères</a:t>
+            </a:r>
+            <a:r>
+              <a:rPr lang="en-GB" altLang="fr-FR" dirty="0"/>
+              <a:t> </a:t>
+            </a:r>
+            <a:r>
+              <a:rPr lang="en-GB" altLang="fr-FR" dirty="0" err="1"/>
+              <a:t>s'appelle</a:t>
+            </a:r>
+            <a:r>
+              <a:rPr lang="en-GB" altLang="fr-FR" dirty="0"/>
+              <a:t> </a:t>
+            </a:r>
+            <a:r>
+              <a:rPr lang="en-GB" altLang="fr-FR" b="1" dirty="0" err="1"/>
+              <a:t>unpickling</a:t>
+            </a:r>
+            <a:endParaRPr lang="en-GB" altLang="fr-FR" dirty="0"/>
           </a:p>
           <a:p>
             <a:pPr lvl="1"/>
             <a:r>
-              <a:rPr lang="fr-FR" dirty="0"/>
-              <a:t>Sérialisation</a:t>
-            </a:r>
-          </a:p>
-          <a:p>
-            <a:pPr lvl="1"/>
-            <a:r>
-              <a:rPr lang="fr-FR" dirty="0" err="1"/>
-              <a:t>Marshalling</a:t>
-            </a:r>
-            <a:endParaRPr lang="fr-FR" dirty="0"/>
-          </a:p>
-          <a:p>
-            <a:r>
-              <a:rPr lang="fr-FR" dirty="0"/>
-              <a:t>Transformation inverse</a:t>
-            </a:r>
-          </a:p>
-          <a:p>
-            <a:pPr lvl="1"/>
-            <a:r>
-              <a:rPr lang="fr-FR" dirty="0" err="1"/>
-              <a:t>Désérialisation</a:t>
-            </a:r>
-            <a:endParaRPr lang="fr-FR" dirty="0"/>
-          </a:p>
-          <a:p>
-            <a:pPr lvl="1"/>
-            <a:r>
-              <a:rPr lang="fr-FR" dirty="0" err="1"/>
-              <a:t>Unmarshalling</a:t>
+              <a:rPr lang="en-GB" altLang="fr-FR" dirty="0"/>
+              <a:t>Entre pickling et </a:t>
+            </a:r>
+            <a:r>
+              <a:rPr lang="en-GB" altLang="fr-FR" dirty="0" err="1"/>
+              <a:t>unpickling</a:t>
+            </a:r>
+            <a:r>
+              <a:rPr lang="en-GB" altLang="fr-FR" dirty="0"/>
+              <a:t>, la </a:t>
+            </a:r>
+            <a:r>
+              <a:rPr lang="en-GB" altLang="fr-FR" dirty="0" err="1"/>
+              <a:t>chaîne</a:t>
+            </a:r>
+            <a:r>
+              <a:rPr lang="en-GB" altLang="fr-FR" dirty="0"/>
+              <a:t> de </a:t>
+            </a:r>
+            <a:r>
+              <a:rPr lang="en-GB" altLang="fr-FR" dirty="0" err="1"/>
+              <a:t>caractères</a:t>
+            </a:r>
+            <a:r>
+              <a:rPr lang="en-GB" altLang="fr-FR" dirty="0"/>
+              <a:t> </a:t>
+            </a:r>
+            <a:r>
+              <a:rPr lang="en-GB" altLang="fr-FR" dirty="0" err="1"/>
+              <a:t>représentant</a:t>
+            </a:r>
+            <a:r>
+              <a:rPr lang="en-GB" altLang="fr-FR" dirty="0"/>
+              <a:t> </a:t>
+            </a:r>
+            <a:r>
+              <a:rPr lang="en-GB" altLang="fr-FR" dirty="0" err="1"/>
+              <a:t>l'objet</a:t>
+            </a:r>
+            <a:r>
+              <a:rPr lang="en-GB" altLang="fr-FR" dirty="0"/>
+              <a:t> a </a:t>
+            </a:r>
+            <a:r>
+              <a:rPr lang="en-GB" altLang="fr-FR" dirty="0" err="1"/>
+              <a:t>pu</a:t>
+            </a:r>
+            <a:r>
+              <a:rPr lang="en-GB" altLang="fr-FR" dirty="0"/>
+              <a:t> </a:t>
+            </a:r>
+            <a:r>
+              <a:rPr lang="en-GB" altLang="fr-FR" dirty="0" err="1"/>
+              <a:t>avoir</a:t>
+            </a:r>
+            <a:r>
+              <a:rPr lang="en-GB" altLang="fr-FR" dirty="0"/>
+              <a:t> </a:t>
+            </a:r>
+            <a:r>
+              <a:rPr lang="en-GB" altLang="fr-FR" dirty="0" err="1"/>
+              <a:t>été</a:t>
+            </a:r>
+            <a:r>
+              <a:rPr lang="en-GB" altLang="fr-FR" dirty="0"/>
+              <a:t> </a:t>
+            </a:r>
+            <a:r>
+              <a:rPr lang="en-GB" altLang="fr-FR" dirty="0" err="1"/>
+              <a:t>enregistrée</a:t>
+            </a:r>
+            <a:r>
+              <a:rPr lang="en-GB" altLang="fr-FR" dirty="0"/>
+              <a:t> </a:t>
+            </a:r>
+            <a:r>
+              <a:rPr lang="en-GB" altLang="fr-FR" dirty="0" err="1"/>
+              <a:t>dans</a:t>
+            </a:r>
+            <a:r>
+              <a:rPr lang="en-GB" altLang="fr-FR" dirty="0"/>
+              <a:t> un </a:t>
+            </a:r>
+            <a:r>
+              <a:rPr lang="en-GB" altLang="fr-FR" dirty="0" err="1"/>
+              <a:t>fichier</a:t>
+            </a:r>
+            <a:r>
+              <a:rPr lang="en-GB" altLang="fr-FR" dirty="0"/>
+              <a:t>, </a:t>
+            </a:r>
+            <a:r>
+              <a:rPr lang="en-GB" altLang="fr-FR" dirty="0" err="1"/>
+              <a:t>ou</a:t>
+            </a:r>
+            <a:r>
+              <a:rPr lang="en-GB" altLang="fr-FR" dirty="0"/>
+              <a:t> </a:t>
+            </a:r>
+            <a:r>
+              <a:rPr lang="en-GB" altLang="fr-FR" dirty="0" err="1"/>
+              <a:t>avoir</a:t>
+            </a:r>
+            <a:r>
+              <a:rPr lang="en-GB" altLang="fr-FR" dirty="0"/>
+              <a:t> </a:t>
+            </a:r>
+            <a:r>
+              <a:rPr lang="en-GB" altLang="fr-FR" dirty="0" err="1"/>
+              <a:t>été</a:t>
+            </a:r>
+            <a:r>
+              <a:rPr lang="en-GB" altLang="fr-FR" dirty="0"/>
+              <a:t> </a:t>
+            </a:r>
+            <a:r>
+              <a:rPr lang="en-GB" altLang="fr-FR" dirty="0" err="1"/>
+              <a:t>envoyée</a:t>
+            </a:r>
+            <a:r>
+              <a:rPr lang="en-GB" altLang="fr-FR" dirty="0"/>
+              <a:t> à </a:t>
+            </a:r>
+            <a:r>
+              <a:rPr lang="en-GB" altLang="fr-FR" dirty="0" err="1"/>
+              <a:t>une</a:t>
+            </a:r>
+            <a:r>
+              <a:rPr lang="en-GB" altLang="fr-FR" dirty="0"/>
+              <a:t> machine </a:t>
+            </a:r>
+            <a:r>
+              <a:rPr lang="en-GB" altLang="fr-FR" dirty="0" err="1"/>
+              <a:t>éloignée</a:t>
+            </a:r>
+            <a:r>
+              <a:rPr lang="en-GB" altLang="fr-FR" dirty="0"/>
+              <a:t> via </a:t>
+            </a:r>
+            <a:r>
+              <a:rPr lang="en-GB" altLang="fr-FR" dirty="0" err="1"/>
+              <a:t>une</a:t>
+            </a:r>
+            <a:r>
+              <a:rPr lang="en-GB" altLang="fr-FR" dirty="0"/>
+              <a:t> connexion </a:t>
+            </a:r>
+            <a:r>
+              <a:rPr lang="en-GB" altLang="fr-FR" dirty="0" err="1"/>
+              <a:t>réseau</a:t>
             </a:r>
             <a:endParaRPr lang="fr-FR" dirty="0"/>
           </a:p>
@@ -4979,7 +5309,7 @@
     </p:spTree>
     <p:extLst>
       <p:ext uri="{BB962C8B-B14F-4D97-AF65-F5344CB8AC3E}">
-        <p14:creationId xmlns:p14="http://schemas.microsoft.com/office/powerpoint/2010/main" val="538571596"/>
+        <p14:creationId xmlns:p14="http://schemas.microsoft.com/office/powerpoint/2010/main" val="4167322337"/>
       </p:ext>
     </p:extLst>
   </p:cSld>
@@ -5045,375 +5375,51 @@
           <a:lstStyle/>
           <a:p>
             <a:r>
-              <a:rPr lang="en-GB" altLang="fr-FR" dirty="0" err="1"/>
-              <a:t>C'est</a:t>
-            </a:r>
-            <a:r>
-              <a:rPr lang="en-GB" altLang="fr-FR" dirty="0"/>
-              <a:t> un module </a:t>
-            </a:r>
-            <a:r>
-              <a:rPr lang="en-GB" altLang="fr-FR" dirty="0" err="1"/>
-              <a:t>étonnant</a:t>
-            </a:r>
-            <a:r>
-              <a:rPr lang="en-GB" altLang="fr-FR" dirty="0"/>
-              <a:t> qui </a:t>
-            </a:r>
-            <a:r>
-              <a:rPr lang="en-GB" altLang="fr-FR" dirty="0" err="1"/>
-              <a:t>peut</a:t>
-            </a:r>
-            <a:r>
-              <a:rPr lang="en-GB" altLang="fr-FR" dirty="0"/>
-              <a:t> </a:t>
-            </a:r>
-            <a:r>
-              <a:rPr lang="en-GB" altLang="fr-FR" dirty="0" err="1"/>
-              <a:t>prendre</a:t>
-            </a:r>
-            <a:r>
-              <a:rPr lang="en-GB" altLang="fr-FR" dirty="0"/>
-              <a:t> </a:t>
-            </a:r>
-            <a:r>
-              <a:rPr lang="en-GB" altLang="fr-FR" dirty="0" err="1"/>
-              <a:t>presque</a:t>
-            </a:r>
-            <a:r>
-              <a:rPr lang="en-GB" altLang="fr-FR" dirty="0"/>
-              <a:t> </a:t>
-            </a:r>
-            <a:r>
-              <a:rPr lang="en-GB" altLang="fr-FR" dirty="0" err="1"/>
-              <a:t>n'importe</a:t>
-            </a:r>
-            <a:r>
-              <a:rPr lang="en-GB" altLang="fr-FR" dirty="0"/>
-              <a:t> </a:t>
-            </a:r>
-            <a:r>
-              <a:rPr lang="en-GB" altLang="fr-FR" dirty="0" err="1"/>
-              <a:t>quel</a:t>
-            </a:r>
-            <a:r>
-              <a:rPr lang="en-GB" altLang="fr-FR" dirty="0"/>
-              <a:t> objet Python, et le </a:t>
-            </a:r>
-            <a:r>
-              <a:rPr lang="en-GB" altLang="fr-FR" dirty="0" err="1"/>
-              <a:t>convertir</a:t>
-            </a:r>
-            <a:r>
-              <a:rPr lang="en-GB" altLang="fr-FR" dirty="0"/>
-              <a:t> </a:t>
-            </a:r>
-            <a:r>
-              <a:rPr lang="en-GB" altLang="fr-FR" dirty="0" err="1"/>
-              <a:t>en</a:t>
-            </a:r>
-            <a:r>
-              <a:rPr lang="en-GB" altLang="fr-FR" dirty="0"/>
-              <a:t> </a:t>
-            </a:r>
-            <a:r>
-              <a:rPr lang="en-GB" altLang="fr-FR" dirty="0" err="1"/>
-              <a:t>une</a:t>
-            </a:r>
-            <a:r>
-              <a:rPr lang="en-GB" altLang="fr-FR" dirty="0"/>
-              <a:t> </a:t>
-            </a:r>
-            <a:r>
-              <a:rPr lang="en-GB" altLang="fr-FR" dirty="0" err="1"/>
-              <a:t>représentation</a:t>
-            </a:r>
-            <a:r>
-              <a:rPr lang="en-GB" altLang="fr-FR" dirty="0"/>
-              <a:t> sous </a:t>
-            </a:r>
-            <a:r>
-              <a:rPr lang="en-GB" altLang="fr-FR" dirty="0" err="1"/>
-              <a:t>forme</a:t>
-            </a:r>
-            <a:r>
-              <a:rPr lang="en-GB" altLang="fr-FR" dirty="0"/>
-              <a:t> de </a:t>
-            </a:r>
-            <a:r>
-              <a:rPr lang="en-GB" altLang="fr-FR" dirty="0" err="1"/>
-              <a:t>chaîne</a:t>
-            </a:r>
-            <a:r>
-              <a:rPr lang="en-GB" altLang="fr-FR" dirty="0"/>
-              <a:t> de </a:t>
-            </a:r>
-            <a:r>
-              <a:rPr lang="en-GB" altLang="fr-FR" dirty="0" err="1"/>
-              <a:t>caractères</a:t>
-            </a:r>
-            <a:endParaRPr lang="en-GB" altLang="fr-FR" dirty="0"/>
-          </a:p>
-          <a:p>
-            <a:r>
-              <a:rPr lang="en-GB" altLang="fr-FR" dirty="0"/>
-              <a:t>Ce </a:t>
-            </a:r>
-            <a:r>
-              <a:rPr lang="en-GB" altLang="fr-FR" dirty="0" err="1"/>
-              <a:t>processus</a:t>
-            </a:r>
-            <a:r>
-              <a:rPr lang="en-GB" altLang="fr-FR" dirty="0"/>
-              <a:t> </a:t>
-            </a:r>
-            <a:r>
-              <a:rPr lang="en-GB" altLang="fr-FR" dirty="0" err="1"/>
-              <a:t>s'appelle</a:t>
-            </a:r>
-            <a:r>
-              <a:rPr lang="en-GB" altLang="fr-FR" dirty="0"/>
-              <a:t> </a:t>
-            </a:r>
-            <a:r>
-              <a:rPr lang="en-GB" altLang="fr-FR" b="1" dirty="0"/>
-              <a:t>pickling</a:t>
-            </a:r>
-            <a:endParaRPr lang="en-GB" altLang="fr-FR" dirty="0"/>
-          </a:p>
-          <a:p>
-            <a:r>
-              <a:rPr lang="en-GB" altLang="fr-FR" dirty="0" err="1"/>
-              <a:t>Reconstruire</a:t>
-            </a:r>
-            <a:r>
-              <a:rPr lang="en-GB" altLang="fr-FR" dirty="0"/>
-              <a:t> </a:t>
-            </a:r>
-            <a:r>
-              <a:rPr lang="en-GB" altLang="fr-FR" dirty="0" err="1"/>
-              <a:t>l'objet</a:t>
-            </a:r>
-            <a:r>
-              <a:rPr lang="en-GB" altLang="fr-FR" dirty="0"/>
-              <a:t> à </a:t>
-            </a:r>
-            <a:r>
-              <a:rPr lang="en-GB" altLang="fr-FR" dirty="0" err="1"/>
-              <a:t>partir</a:t>
-            </a:r>
-            <a:r>
-              <a:rPr lang="en-GB" altLang="fr-FR" dirty="0"/>
-              <a:t> de </a:t>
-            </a:r>
-            <a:r>
-              <a:rPr lang="en-GB" altLang="fr-FR" dirty="0" err="1"/>
-              <a:t>sa</a:t>
-            </a:r>
-            <a:r>
-              <a:rPr lang="en-GB" altLang="fr-FR" dirty="0"/>
-              <a:t> </a:t>
-            </a:r>
-            <a:r>
-              <a:rPr lang="en-GB" altLang="fr-FR" dirty="0" err="1"/>
-              <a:t>représentation</a:t>
-            </a:r>
-            <a:r>
-              <a:rPr lang="en-GB" altLang="fr-FR" dirty="0"/>
-              <a:t> </a:t>
-            </a:r>
-            <a:r>
-              <a:rPr lang="en-GB" altLang="fr-FR" dirty="0" err="1"/>
-              <a:t>en</a:t>
-            </a:r>
-            <a:r>
-              <a:rPr lang="en-GB" altLang="fr-FR" dirty="0"/>
-              <a:t> </a:t>
-            </a:r>
-            <a:r>
-              <a:rPr lang="en-GB" altLang="fr-FR" dirty="0" err="1"/>
-              <a:t>chaîne</a:t>
-            </a:r>
-            <a:r>
-              <a:rPr lang="en-GB" altLang="fr-FR" dirty="0"/>
-              <a:t> de </a:t>
-            </a:r>
-            <a:r>
-              <a:rPr lang="en-GB" altLang="fr-FR" dirty="0" err="1"/>
-              <a:t>caractères</a:t>
-            </a:r>
-            <a:r>
-              <a:rPr lang="en-GB" altLang="fr-FR" dirty="0"/>
-              <a:t> </a:t>
-            </a:r>
-            <a:r>
-              <a:rPr lang="en-GB" altLang="fr-FR" dirty="0" err="1"/>
-              <a:t>s'appelle</a:t>
-            </a:r>
-            <a:r>
-              <a:rPr lang="en-GB" altLang="fr-FR" dirty="0"/>
-              <a:t> </a:t>
-            </a:r>
-            <a:r>
-              <a:rPr lang="en-GB" altLang="fr-FR" b="1" dirty="0" err="1"/>
-              <a:t>unpickling</a:t>
-            </a:r>
-            <a:endParaRPr lang="en-GB" altLang="fr-FR" dirty="0"/>
+              <a:rPr lang="fr-FR" dirty="0"/>
+              <a:t>Si vous avez un objet x, et un objet fichier f ouvert en écriture, la voie la plus simple de "pickler'' l'objet prend seulement une ligne de code </a:t>
+            </a:r>
           </a:p>
           <a:p>
             <a:pPr lvl="1"/>
             <a:r>
-              <a:rPr lang="en-GB" altLang="fr-FR" dirty="0"/>
-              <a:t>Entre pickling et </a:t>
-            </a:r>
-            <a:r>
-              <a:rPr lang="en-GB" altLang="fr-FR" dirty="0" err="1"/>
-              <a:t>unpickling</a:t>
-            </a:r>
-            <a:r>
-              <a:rPr lang="en-GB" altLang="fr-FR" dirty="0"/>
-              <a:t>, la </a:t>
-            </a:r>
-            <a:r>
-              <a:rPr lang="en-GB" altLang="fr-FR" dirty="0" err="1"/>
-              <a:t>chaîne</a:t>
-            </a:r>
-            <a:r>
-              <a:rPr lang="en-GB" altLang="fr-FR" dirty="0"/>
-              <a:t> de </a:t>
-            </a:r>
-            <a:r>
-              <a:rPr lang="en-GB" altLang="fr-FR" dirty="0" err="1"/>
-              <a:t>caractères</a:t>
-            </a:r>
-            <a:r>
-              <a:rPr lang="en-GB" altLang="fr-FR" dirty="0"/>
-              <a:t> </a:t>
-            </a:r>
-            <a:r>
-              <a:rPr lang="en-GB" altLang="fr-FR" dirty="0" err="1"/>
-              <a:t>représentant</a:t>
-            </a:r>
-            <a:r>
-              <a:rPr lang="en-GB" altLang="fr-FR" dirty="0"/>
-              <a:t> </a:t>
-            </a:r>
-            <a:r>
-              <a:rPr lang="en-GB" altLang="fr-FR" dirty="0" err="1"/>
-              <a:t>l'objet</a:t>
-            </a:r>
-            <a:r>
-              <a:rPr lang="en-GB" altLang="fr-FR" dirty="0"/>
-              <a:t> a </a:t>
-            </a:r>
-            <a:r>
-              <a:rPr lang="en-GB" altLang="fr-FR" dirty="0" err="1"/>
-              <a:t>pu</a:t>
-            </a:r>
-            <a:r>
-              <a:rPr lang="en-GB" altLang="fr-FR" dirty="0"/>
-              <a:t> </a:t>
-            </a:r>
-            <a:r>
-              <a:rPr lang="en-GB" altLang="fr-FR" dirty="0" err="1"/>
-              <a:t>avoir</a:t>
-            </a:r>
-            <a:r>
-              <a:rPr lang="en-GB" altLang="fr-FR" dirty="0"/>
-              <a:t> </a:t>
-            </a:r>
-            <a:r>
-              <a:rPr lang="en-GB" altLang="fr-FR" dirty="0" err="1"/>
-              <a:t>été</a:t>
-            </a:r>
-            <a:r>
-              <a:rPr lang="en-GB" altLang="fr-FR" dirty="0"/>
-              <a:t> </a:t>
-            </a:r>
-            <a:r>
-              <a:rPr lang="en-GB" altLang="fr-FR" dirty="0" err="1"/>
-              <a:t>enregistrée</a:t>
-            </a:r>
-            <a:r>
-              <a:rPr lang="en-GB" altLang="fr-FR" dirty="0"/>
-              <a:t> </a:t>
-            </a:r>
-            <a:r>
-              <a:rPr lang="en-GB" altLang="fr-FR" dirty="0" err="1"/>
-              <a:t>dans</a:t>
-            </a:r>
-            <a:r>
-              <a:rPr lang="en-GB" altLang="fr-FR" dirty="0"/>
-              <a:t> un </a:t>
-            </a:r>
-            <a:r>
-              <a:rPr lang="en-GB" altLang="fr-FR" dirty="0" err="1"/>
-              <a:t>fichier</a:t>
-            </a:r>
-            <a:r>
-              <a:rPr lang="en-GB" altLang="fr-FR" dirty="0"/>
-              <a:t>, </a:t>
-            </a:r>
-            <a:r>
-              <a:rPr lang="en-GB" altLang="fr-FR" dirty="0" err="1"/>
-              <a:t>ou</a:t>
-            </a:r>
-            <a:r>
-              <a:rPr lang="en-GB" altLang="fr-FR" dirty="0"/>
-              <a:t> </a:t>
-            </a:r>
-            <a:r>
-              <a:rPr lang="en-GB" altLang="fr-FR" dirty="0" err="1"/>
-              <a:t>avoir</a:t>
-            </a:r>
-            <a:r>
-              <a:rPr lang="en-GB" altLang="fr-FR" dirty="0"/>
-              <a:t> </a:t>
-            </a:r>
-            <a:r>
-              <a:rPr lang="en-GB" altLang="fr-FR" dirty="0" err="1"/>
-              <a:t>été</a:t>
-            </a:r>
-            <a:r>
-              <a:rPr lang="en-GB" altLang="fr-FR" dirty="0"/>
-              <a:t> </a:t>
-            </a:r>
-            <a:r>
-              <a:rPr lang="en-GB" altLang="fr-FR" dirty="0" err="1"/>
-              <a:t>envoyée</a:t>
-            </a:r>
-            <a:r>
-              <a:rPr lang="en-GB" altLang="fr-FR" dirty="0"/>
-              <a:t> à </a:t>
-            </a:r>
-            <a:r>
-              <a:rPr lang="en-GB" altLang="fr-FR" dirty="0" err="1"/>
-              <a:t>une</a:t>
-            </a:r>
-            <a:r>
-              <a:rPr lang="en-GB" altLang="fr-FR" dirty="0"/>
-              <a:t> machine </a:t>
-            </a:r>
-            <a:r>
-              <a:rPr lang="en-GB" altLang="fr-FR" dirty="0" err="1"/>
-              <a:t>éloignée</a:t>
-            </a:r>
-            <a:r>
-              <a:rPr lang="en-GB" altLang="fr-FR" dirty="0"/>
-              <a:t> via </a:t>
-            </a:r>
-            <a:r>
-              <a:rPr lang="en-GB" altLang="fr-FR" dirty="0" err="1"/>
-              <a:t>une</a:t>
-            </a:r>
-            <a:r>
-              <a:rPr lang="en-GB" altLang="fr-FR" dirty="0"/>
-              <a:t> connexion </a:t>
-            </a:r>
-            <a:r>
-              <a:rPr lang="en-GB" altLang="fr-FR" dirty="0" err="1"/>
-              <a:t>réseau</a:t>
-            </a:r>
+              <a:rPr lang="fr-FR" dirty="0" err="1"/>
+              <a:t>pickle.dump</a:t>
+            </a:r>
+            <a:r>
+              <a:rPr lang="fr-FR" dirty="0"/>
+              <a:t>(x, f)</a:t>
+            </a:r>
+          </a:p>
+          <a:p>
+            <a:r>
+              <a:rPr lang="fr-FR" dirty="0"/>
+              <a:t>Pour "</a:t>
+            </a:r>
+            <a:r>
+              <a:rPr lang="fr-FR" dirty="0" err="1"/>
+              <a:t>unpickler</a:t>
+            </a:r>
+            <a:r>
+              <a:rPr lang="fr-FR" dirty="0"/>
+              <a:t>'' l'objet, si f est un objet fichier ouvert en lecture</a:t>
+            </a:r>
+          </a:p>
+          <a:p>
+            <a:pPr lvl="1"/>
+            <a:r>
+              <a:rPr lang="fr-FR" dirty="0"/>
+              <a:t>x = </a:t>
+            </a:r>
+            <a:r>
+              <a:rPr lang="fr-FR" dirty="0" err="1"/>
+              <a:t>pickle.load</a:t>
+            </a:r>
+            <a:r>
+              <a:rPr lang="fr-FR" dirty="0"/>
+              <a:t>(f)</a:t>
+            </a:r>
+          </a:p>
+          <a:p>
             <a:endParaRPr lang="fr-FR" dirty="0"/>
           </a:p>
         </p:txBody>
@@ -5421,7 +5427,7 @@
     </p:spTree>
     <p:extLst>
       <p:ext uri="{BB962C8B-B14F-4D97-AF65-F5344CB8AC3E}">
-        <p14:creationId xmlns:p14="http://schemas.microsoft.com/office/powerpoint/2010/main" val="4167322337"/>
+        <p14:creationId xmlns:p14="http://schemas.microsoft.com/office/powerpoint/2010/main" val="174018612"/>
       </p:ext>
     </p:extLst>
   </p:cSld>
@@ -5464,10 +5470,9 @@
           <a:lstStyle/>
           <a:p>
             <a:r>
-              <a:rPr lang="fr-FR" dirty="0" err="1"/>
-              <a:t>Pickle</a:t>
-            </a:r>
-            <a:endParaRPr lang="fr-FR" dirty="0"/>
+              <a:rPr lang="fr-FR" dirty="0"/>
+              <a:t>JSON</a:t>
+            </a:r>
           </a:p>
         </p:txBody>
       </p:sp>
@@ -5488,58 +5493,71 @@
           <a:p>
             <a:r>
               <a:rPr lang="fr-FR" dirty="0"/>
-              <a:t>Si vous avez un objet x, et un objet fichier f ouvert en écriture, la voie la plus simple de "pickler'' l'objet prend seulement une ligne de code </a:t>
+              <a:t>JavaScript Object Notation</a:t>
+            </a:r>
+          </a:p>
+          <a:p>
+            <a:r>
+              <a:rPr lang="fr-FR" dirty="0"/>
+              <a:t>Format léger pour l‘échange de données</a:t>
+            </a:r>
+          </a:p>
+          <a:p>
+            <a:r>
+              <a:rPr lang="fr-FR" dirty="0"/>
+              <a:t>Avantages</a:t>
             </a:r>
           </a:p>
           <a:p>
             <a:pPr lvl="1"/>
             <a:r>
+              <a:rPr lang="fr-FR"/>
+              <a:t>Typé</a:t>
+            </a:r>
+            <a:endParaRPr lang="fr-FR" dirty="0"/>
+          </a:p>
+          <a:p>
+            <a:pPr lvl="1"/>
+            <a:r>
+              <a:rPr lang="fr-FR" dirty="0"/>
+              <a:t>Facile pour les machines à générer et </a:t>
+            </a:r>
+            <a:r>
               <a:rPr lang="fr-FR" dirty="0" err="1"/>
-              <a:t>pickle.dump</a:t>
-            </a:r>
-            <a:r>
-              <a:rPr lang="fr-FR" dirty="0"/>
-              <a:t>(x, f)</a:t>
-            </a:r>
-          </a:p>
-          <a:p>
-            <a:r>
-              <a:rPr lang="fr-FR" dirty="0"/>
-              <a:t>Pour "</a:t>
-            </a:r>
-            <a:r>
-              <a:rPr lang="fr-FR" dirty="0" err="1"/>
-              <a:t>unpickler</a:t>
-            </a:r>
-            <a:r>
-              <a:rPr lang="fr-FR" dirty="0"/>
-              <a:t>'' l'objet, si f est un objet fichier ouvert en lecture</a:t>
-            </a:r>
-          </a:p>
-          <a:p>
-            <a:pPr lvl="1"/>
-            <a:r>
-              <a:rPr lang="fr-FR" dirty="0"/>
-              <a:t>x = </a:t>
-            </a:r>
-            <a:r>
-              <a:rPr lang="fr-FR" dirty="0" err="1"/>
-              <a:t>pickle.load</a:t>
-            </a:r>
-            <a:r>
-              <a:rPr lang="fr-FR" dirty="0"/>
-              <a:t>(f)</a:t>
-            </a:r>
-          </a:p>
-          <a:p>
+              <a:t>parser</a:t>
+            </a:r>
             <a:endParaRPr lang="fr-FR" dirty="0"/>
           </a:p>
         </p:txBody>
       </p:sp>
+      <p:pic>
+        <p:nvPicPr>
+          <p:cNvPr id="4" name="Image 3"/>
+          <p:cNvPicPr>
+            <a:picLocks noChangeAspect="1"/>
+          </p:cNvPicPr>
+          <p:nvPr/>
+        </p:nvPicPr>
+        <p:blipFill>
+          <a:blip r:embed="rId2"/>
+          <a:stretch>
+            <a:fillRect/>
+          </a:stretch>
+        </p:blipFill>
+        <p:spPr>
+          <a:xfrm>
+            <a:off x="2076313" y="3755821"/>
+            <a:ext cx="4972447" cy="2954082"/>
+          </a:xfrm>
+          <a:prstGeom prst="rect">
+            <a:avLst/>
+          </a:prstGeom>
+        </p:spPr>
+      </p:pic>
     </p:spTree>
     <p:extLst>
       <p:ext uri="{BB962C8B-B14F-4D97-AF65-F5344CB8AC3E}">
-        <p14:creationId xmlns:p14="http://schemas.microsoft.com/office/powerpoint/2010/main" val="174018612"/>
+        <p14:creationId xmlns:p14="http://schemas.microsoft.com/office/powerpoint/2010/main" val="2359732945"/>
       </p:ext>
     </p:extLst>
   </p:cSld>
@@ -5645,136 +5663,6 @@
 </file>
 
 <file path=ppt/slides/slide20.xml><?xml version="1.0" encoding="utf-8"?>
-<p:sld xmlns:a="http://schemas.openxmlformats.org/drawingml/2006/main" xmlns:r="http://schemas.openxmlformats.org/officeDocument/2006/relationships" xmlns:p="http://schemas.openxmlformats.org/presentationml/2006/main">
-  <p:cSld>
-    <p:spTree>
-      <p:nvGrpSpPr>
-        <p:cNvPr id="1" name=""/>
-        <p:cNvGrpSpPr/>
-        <p:nvPr/>
-      </p:nvGrpSpPr>
-      <p:grpSpPr>
-        <a:xfrm>
-          <a:off x="0" y="0"/>
-          <a:ext cx="0" cy="0"/>
-          <a:chOff x="0" y="0"/>
-          <a:chExt cx="0" cy="0"/>
-        </a:xfrm>
-      </p:grpSpPr>
-      <p:sp>
-        <p:nvSpPr>
-          <p:cNvPr id="2" name="Titre 1"/>
-          <p:cNvSpPr>
-            <a:spLocks noGrp="1"/>
-          </p:cNvSpPr>
-          <p:nvPr>
-            <p:ph type="title"/>
-          </p:nvPr>
-        </p:nvSpPr>
-        <p:spPr/>
-        <p:txBody>
-          <a:bodyPr/>
-          <a:lstStyle/>
-          <a:p>
-            <a:r>
-              <a:rPr lang="fr-FR" dirty="0"/>
-              <a:t>JSON</a:t>
-            </a:r>
-          </a:p>
-        </p:txBody>
-      </p:sp>
-      <p:sp>
-        <p:nvSpPr>
-          <p:cNvPr id="3" name="Espace réservé du contenu 2"/>
-          <p:cNvSpPr>
-            <a:spLocks noGrp="1"/>
-          </p:cNvSpPr>
-          <p:nvPr>
-            <p:ph idx="1"/>
-          </p:nvPr>
-        </p:nvSpPr>
-        <p:spPr/>
-        <p:txBody>
-          <a:bodyPr/>
-          <a:lstStyle/>
-          <a:p>
-            <a:r>
-              <a:rPr lang="fr-FR" dirty="0"/>
-              <a:t>JavaScript Object Notation</a:t>
-            </a:r>
-          </a:p>
-          <a:p>
-            <a:r>
-              <a:rPr lang="fr-FR" dirty="0"/>
-              <a:t>Format léger pour l‘échange de données</a:t>
-            </a:r>
-          </a:p>
-          <a:p>
-            <a:r>
-              <a:rPr lang="fr-FR" dirty="0"/>
-              <a:t>Avantages</a:t>
-            </a:r>
-          </a:p>
-          <a:p>
-            <a:pPr lvl="1"/>
-            <a:r>
-              <a:rPr lang="fr-FR"/>
-              <a:t>Typé</a:t>
-            </a:r>
-            <a:endParaRPr lang="fr-FR" dirty="0"/>
-          </a:p>
-          <a:p>
-            <a:pPr lvl="1"/>
-            <a:r>
-              <a:rPr lang="fr-FR" dirty="0"/>
-              <a:t>Facile pour les machines à générer et </a:t>
-            </a:r>
-            <a:r>
-              <a:rPr lang="fr-FR" dirty="0" err="1"/>
-              <a:t>parser</a:t>
-            </a:r>
-            <a:endParaRPr lang="fr-FR" dirty="0"/>
-          </a:p>
-        </p:txBody>
-      </p:sp>
-      <p:pic>
-        <p:nvPicPr>
-          <p:cNvPr id="4" name="Image 3"/>
-          <p:cNvPicPr>
-            <a:picLocks noChangeAspect="1"/>
-          </p:cNvPicPr>
-          <p:nvPr/>
-        </p:nvPicPr>
-        <p:blipFill>
-          <a:blip r:embed="rId2"/>
-          <a:stretch>
-            <a:fillRect/>
-          </a:stretch>
-        </p:blipFill>
-        <p:spPr>
-          <a:xfrm>
-            <a:off x="2076313" y="3755821"/>
-            <a:ext cx="4972447" cy="2954082"/>
-          </a:xfrm>
-          <a:prstGeom prst="rect">
-            <a:avLst/>
-          </a:prstGeom>
-        </p:spPr>
-      </p:pic>
-    </p:spTree>
-    <p:extLst>
-      <p:ext uri="{BB962C8B-B14F-4D97-AF65-F5344CB8AC3E}">
-        <p14:creationId xmlns:p14="http://schemas.microsoft.com/office/powerpoint/2010/main" val="2359732945"/>
-      </p:ext>
-    </p:extLst>
-  </p:cSld>
-  <p:clrMapOvr>
-    <a:masterClrMapping/>
-  </p:clrMapOvr>
-</p:sld>
-</file>
-
-<file path=ppt/slides/slide21.xml><?xml version="1.0" encoding="utf-8"?>
 <p:sld xmlns:a="http://schemas.openxmlformats.org/drawingml/2006/main" xmlns:r="http://schemas.openxmlformats.org/officeDocument/2006/relationships" xmlns:p="http://schemas.openxmlformats.org/presentationml/2006/main">
   <p:cSld>
     <p:spTree>
